--- a/הצגת קהל פרויכט יוד 2026 - יונתן טורפשטיין.pptx
+++ b/הצגת קהל פרויכט יוד 2026 - יונתן טורפשטיין.pptx
@@ -690,13 +690,13 @@
   <p:clrMapOvr>
     <a:masterClrMapping/>
   </p:clrMapOvr>
-  <mc:AlternateContent xmlns:mc="http://schemas.openxmlformats.org/markup-compatibility/2006">
-    <mc:Choice xmlns:p14="http://schemas.microsoft.com/office/powerpoint/2010/main" Requires="p14">
+  <mc:AlternateContent xmlns:mc="http://schemas.openxmlformats.org/markup-compatibility/2006" xmlns:p14="http://schemas.microsoft.com/office/powerpoint/2010/main">
+    <mc:Choice Requires="p14">
       <p:transition spd="slow" p14:dur="1500">
         <p:random/>
       </p:transition>
     </mc:Choice>
-    <mc:Fallback>
+    <mc:Fallback xmlns="">
       <p:transition spd="slow">
         <p:random/>
       </p:transition>
@@ -902,13 +902,13 @@
   <p:clrMapOvr>
     <a:masterClrMapping/>
   </p:clrMapOvr>
-  <mc:AlternateContent xmlns:mc="http://schemas.openxmlformats.org/markup-compatibility/2006">
-    <mc:Choice xmlns:p14="http://schemas.microsoft.com/office/powerpoint/2010/main" Requires="p14">
+  <mc:AlternateContent xmlns:mc="http://schemas.openxmlformats.org/markup-compatibility/2006" xmlns:p14="http://schemas.microsoft.com/office/powerpoint/2010/main">
+    <mc:Choice Requires="p14">
       <p:transition spd="slow" p14:dur="1500">
         <p:random/>
       </p:transition>
     </mc:Choice>
-    <mc:Fallback>
+    <mc:Fallback xmlns="">
       <p:transition spd="slow">
         <p:random/>
       </p:transition>
@@ -1124,13 +1124,13 @@
   <p:clrMapOvr>
     <a:masterClrMapping/>
   </p:clrMapOvr>
-  <mc:AlternateContent xmlns:mc="http://schemas.openxmlformats.org/markup-compatibility/2006">
-    <mc:Choice xmlns:p14="http://schemas.microsoft.com/office/powerpoint/2010/main" Requires="p14">
+  <mc:AlternateContent xmlns:mc="http://schemas.openxmlformats.org/markup-compatibility/2006" xmlns:p14="http://schemas.microsoft.com/office/powerpoint/2010/main">
+    <mc:Choice Requires="p14">
       <p:transition spd="slow" p14:dur="1500">
         <p:random/>
       </p:transition>
     </mc:Choice>
-    <mc:Fallback>
+    <mc:Fallback xmlns="">
       <p:transition spd="slow">
         <p:random/>
       </p:transition>
@@ -1336,13 +1336,13 @@
   <p:clrMapOvr>
     <a:masterClrMapping/>
   </p:clrMapOvr>
-  <mc:AlternateContent xmlns:mc="http://schemas.openxmlformats.org/markup-compatibility/2006">
-    <mc:Choice xmlns:p14="http://schemas.microsoft.com/office/powerpoint/2010/main" Requires="p14">
+  <mc:AlternateContent xmlns:mc="http://schemas.openxmlformats.org/markup-compatibility/2006" xmlns:p14="http://schemas.microsoft.com/office/powerpoint/2010/main">
+    <mc:Choice Requires="p14">
       <p:transition spd="slow" p14:dur="1500">
         <p:random/>
       </p:transition>
     </mc:Choice>
-    <mc:Fallback>
+    <mc:Fallback xmlns="">
       <p:transition spd="slow">
         <p:random/>
       </p:transition>
@@ -1624,13 +1624,13 @@
   <p:clrMapOvr>
     <a:masterClrMapping/>
   </p:clrMapOvr>
-  <mc:AlternateContent xmlns:mc="http://schemas.openxmlformats.org/markup-compatibility/2006">
-    <mc:Choice xmlns:p14="http://schemas.microsoft.com/office/powerpoint/2010/main" Requires="p14">
+  <mc:AlternateContent xmlns:mc="http://schemas.openxmlformats.org/markup-compatibility/2006" xmlns:p14="http://schemas.microsoft.com/office/powerpoint/2010/main">
+    <mc:Choice Requires="p14">
       <p:transition spd="slow" p14:dur="1500">
         <p:random/>
       </p:transition>
     </mc:Choice>
-    <mc:Fallback>
+    <mc:Fallback xmlns="">
       <p:transition spd="slow">
         <p:random/>
       </p:transition>
@@ -1904,13 +1904,13 @@
   <p:clrMapOvr>
     <a:masterClrMapping/>
   </p:clrMapOvr>
-  <mc:AlternateContent xmlns:mc="http://schemas.openxmlformats.org/markup-compatibility/2006">
-    <mc:Choice xmlns:p14="http://schemas.microsoft.com/office/powerpoint/2010/main" Requires="p14">
+  <mc:AlternateContent xmlns:mc="http://schemas.openxmlformats.org/markup-compatibility/2006" xmlns:p14="http://schemas.microsoft.com/office/powerpoint/2010/main">
+    <mc:Choice Requires="p14">
       <p:transition spd="slow" p14:dur="1500">
         <p:random/>
       </p:transition>
     </mc:Choice>
-    <mc:Fallback>
+    <mc:Fallback xmlns="">
       <p:transition spd="slow">
         <p:random/>
       </p:transition>
@@ -2331,13 +2331,13 @@
   <p:clrMapOvr>
     <a:masterClrMapping/>
   </p:clrMapOvr>
-  <mc:AlternateContent xmlns:mc="http://schemas.openxmlformats.org/markup-compatibility/2006">
-    <mc:Choice xmlns:p14="http://schemas.microsoft.com/office/powerpoint/2010/main" Requires="p14">
+  <mc:AlternateContent xmlns:mc="http://schemas.openxmlformats.org/markup-compatibility/2006" xmlns:p14="http://schemas.microsoft.com/office/powerpoint/2010/main">
+    <mc:Choice Requires="p14">
       <p:transition spd="slow" p14:dur="1500">
         <p:random/>
       </p:transition>
     </mc:Choice>
-    <mc:Fallback>
+    <mc:Fallback xmlns="">
       <p:transition spd="slow">
         <p:random/>
       </p:transition>
@@ -2485,13 +2485,13 @@
   <p:clrMapOvr>
     <a:masterClrMapping/>
   </p:clrMapOvr>
-  <mc:AlternateContent xmlns:mc="http://schemas.openxmlformats.org/markup-compatibility/2006">
-    <mc:Choice xmlns:p14="http://schemas.microsoft.com/office/powerpoint/2010/main" Requires="p14">
+  <mc:AlternateContent xmlns:mc="http://schemas.openxmlformats.org/markup-compatibility/2006" xmlns:p14="http://schemas.microsoft.com/office/powerpoint/2010/main">
+    <mc:Choice Requires="p14">
       <p:transition spd="slow" p14:dur="1500">
         <p:random/>
       </p:transition>
     </mc:Choice>
-    <mc:Fallback>
+    <mc:Fallback xmlns="">
       <p:transition spd="slow">
         <p:random/>
       </p:transition>
@@ -2610,13 +2610,13 @@
   <p:clrMapOvr>
     <a:masterClrMapping/>
   </p:clrMapOvr>
-  <mc:AlternateContent xmlns:mc="http://schemas.openxmlformats.org/markup-compatibility/2006">
-    <mc:Choice xmlns:p14="http://schemas.microsoft.com/office/powerpoint/2010/main" Requires="p14">
+  <mc:AlternateContent xmlns:mc="http://schemas.openxmlformats.org/markup-compatibility/2006" xmlns:p14="http://schemas.microsoft.com/office/powerpoint/2010/main">
+    <mc:Choice Requires="p14">
       <p:transition spd="slow" p14:dur="1500">
         <p:random/>
       </p:transition>
     </mc:Choice>
-    <mc:Fallback>
+    <mc:Fallback xmlns="">
       <p:transition spd="slow">
         <p:random/>
       </p:transition>
@@ -2935,13 +2935,13 @@
   <p:clrMapOvr>
     <a:masterClrMapping/>
   </p:clrMapOvr>
-  <mc:AlternateContent xmlns:mc="http://schemas.openxmlformats.org/markup-compatibility/2006">
-    <mc:Choice xmlns:p14="http://schemas.microsoft.com/office/powerpoint/2010/main" Requires="p14">
+  <mc:AlternateContent xmlns:mc="http://schemas.openxmlformats.org/markup-compatibility/2006" xmlns:p14="http://schemas.microsoft.com/office/powerpoint/2010/main">
+    <mc:Choice Requires="p14">
       <p:transition spd="slow" p14:dur="1500">
         <p:random/>
       </p:transition>
     </mc:Choice>
-    <mc:Fallback>
+    <mc:Fallback xmlns="">
       <p:transition spd="slow">
         <p:random/>
       </p:transition>
@@ -3236,13 +3236,13 @@
   <p:clrMapOvr>
     <a:masterClrMapping/>
   </p:clrMapOvr>
-  <mc:AlternateContent xmlns:mc="http://schemas.openxmlformats.org/markup-compatibility/2006">
-    <mc:Choice xmlns:p14="http://schemas.microsoft.com/office/powerpoint/2010/main" Requires="p14">
+  <mc:AlternateContent xmlns:mc="http://schemas.openxmlformats.org/markup-compatibility/2006" xmlns:p14="http://schemas.microsoft.com/office/powerpoint/2010/main">
+    <mc:Choice Requires="p14">
       <p:transition spd="slow" p14:dur="1500">
         <p:random/>
       </p:transition>
     </mc:Choice>
-    <mc:Fallback>
+    <mc:Fallback xmlns="">
       <p:transition spd="slow">
         <p:random/>
       </p:transition>
@@ -3538,13 +3538,13 @@
     <p:sldLayoutId id="2147483658" r:id="rId10"/>
     <p:sldLayoutId id="2147483659" r:id="rId11"/>
   </p:sldLayoutIdLst>
-  <mc:AlternateContent xmlns:mc="http://schemas.openxmlformats.org/markup-compatibility/2006">
-    <mc:Choice xmlns:p14="http://schemas.microsoft.com/office/powerpoint/2010/main" Requires="p14">
+  <mc:AlternateContent xmlns:mc="http://schemas.openxmlformats.org/markup-compatibility/2006" xmlns:p14="http://schemas.microsoft.com/office/powerpoint/2010/main">
+    <mc:Choice Requires="p14">
       <p:transition spd="slow" p14:dur="1500">
         <p:random/>
       </p:transition>
     </mc:Choice>
-    <mc:Fallback>
+    <mc:Fallback xmlns="">
       <p:transition spd="slow">
         <p:random/>
       </p:transition>
@@ -8825,13 +8825,13 @@
   <p:clrMapOvr>
     <a:masterClrMapping/>
   </p:clrMapOvr>
-  <mc:AlternateContent xmlns:mc="http://schemas.openxmlformats.org/markup-compatibility/2006">
-    <mc:Choice xmlns:p14="http://schemas.microsoft.com/office/powerpoint/2010/main" Requires="p14">
+  <mc:AlternateContent xmlns:mc="http://schemas.openxmlformats.org/markup-compatibility/2006" xmlns:p14="http://schemas.microsoft.com/office/powerpoint/2010/main">
+    <mc:Choice Requires="p14">
       <p:transition spd="slow" p14:dur="1500">
         <p:random/>
       </p:transition>
     </mc:Choice>
-    <mc:Fallback>
+    <mc:Fallback xmlns="">
       <p:transition spd="slow">
         <p:random/>
       </p:transition>
@@ -9234,13 +9234,13 @@
   <p:clrMapOvr>
     <a:masterClrMapping/>
   </p:clrMapOvr>
-  <mc:AlternateContent xmlns:mc="http://schemas.openxmlformats.org/markup-compatibility/2006">
-    <mc:Choice xmlns:p14="http://schemas.microsoft.com/office/powerpoint/2010/main" Requires="p14">
+  <mc:AlternateContent xmlns:mc="http://schemas.openxmlformats.org/markup-compatibility/2006" xmlns:p14="http://schemas.microsoft.com/office/powerpoint/2010/main">
+    <mc:Choice Requires="p14">
       <p:transition spd="slow" p14:dur="1500">
         <p:random/>
       </p:transition>
     </mc:Choice>
-    <mc:Fallback>
+    <mc:Fallback xmlns="">
       <p:transition spd="slow">
         <p:random/>
       </p:transition>
@@ -9371,13 +9371,13 @@
   <p:clrMapOvr>
     <a:masterClrMapping/>
   </p:clrMapOvr>
-  <mc:AlternateContent xmlns:mc="http://schemas.openxmlformats.org/markup-compatibility/2006">
-    <mc:Choice xmlns:p14="http://schemas.microsoft.com/office/powerpoint/2010/main" Requires="p14">
+  <mc:AlternateContent xmlns:mc="http://schemas.openxmlformats.org/markup-compatibility/2006" xmlns:p14="http://schemas.microsoft.com/office/powerpoint/2010/main">
+    <mc:Choice Requires="p14">
       <p:transition spd="slow" p14:dur="1500">
         <p:random/>
       </p:transition>
     </mc:Choice>
-    <mc:Fallback>
+    <mc:Fallback xmlns="">
       <p:transition spd="slow">
         <p:random/>
       </p:transition>
@@ -9712,13 +9712,13 @@
   <p:clrMapOvr>
     <a:masterClrMapping/>
   </p:clrMapOvr>
-  <mc:AlternateContent xmlns:mc="http://schemas.openxmlformats.org/markup-compatibility/2006">
-    <mc:Choice xmlns:p14="http://schemas.microsoft.com/office/powerpoint/2010/main" Requires="p14">
+  <mc:AlternateContent xmlns:mc="http://schemas.openxmlformats.org/markup-compatibility/2006" xmlns:p14="http://schemas.microsoft.com/office/powerpoint/2010/main">
+    <mc:Choice Requires="p14">
       <p:transition spd="slow" p14:dur="1500">
         <p:random/>
       </p:transition>
     </mc:Choice>
-    <mc:Fallback>
+    <mc:Fallback xmlns="">
       <p:transition spd="slow">
         <p:random/>
       </p:transition>
@@ -9945,13 +9945,13 @@
   <p:clrMapOvr>
     <a:masterClrMapping/>
   </p:clrMapOvr>
-  <mc:AlternateContent xmlns:mc="http://schemas.openxmlformats.org/markup-compatibility/2006">
-    <mc:Choice xmlns:p14="http://schemas.microsoft.com/office/powerpoint/2010/main" Requires="p14">
+  <mc:AlternateContent xmlns:mc="http://schemas.openxmlformats.org/markup-compatibility/2006" xmlns:p14="http://schemas.microsoft.com/office/powerpoint/2010/main">
+    <mc:Choice Requires="p14">
       <p:transition spd="slow" p14:dur="1500">
         <p:random/>
       </p:transition>
     </mc:Choice>
-    <mc:Fallback>
+    <mc:Fallback xmlns="">
       <p:transition spd="slow">
         <p:random/>
       </p:transition>
@@ -10234,13 +10234,13 @@
   <p:clrMapOvr>
     <a:masterClrMapping/>
   </p:clrMapOvr>
-  <mc:AlternateContent xmlns:mc="http://schemas.openxmlformats.org/markup-compatibility/2006">
-    <mc:Choice xmlns:p14="http://schemas.microsoft.com/office/powerpoint/2010/main" Requires="p14">
+  <mc:AlternateContent xmlns:mc="http://schemas.openxmlformats.org/markup-compatibility/2006" xmlns:p14="http://schemas.microsoft.com/office/powerpoint/2010/main">
+    <mc:Choice Requires="p14">
       <p:transition spd="slow" p14:dur="1500">
         <p:random/>
       </p:transition>
     </mc:Choice>
-    <mc:Fallback>
+    <mc:Fallback xmlns="">
       <p:transition spd="slow">
         <p:random/>
       </p:transition>
@@ -10250,7 +10250,7 @@
 </file>
 
 <file path=ppt/slides/slide7.xml><?xml version="1.0" encoding="utf-8"?>
-<p:sld xmlns:a="http://schemas.openxmlformats.org/drawingml/2006/main" xmlns:r="http://schemas.openxmlformats.org/officeDocument/2006/relationships" xmlns:p="http://schemas.openxmlformats.org/presentationml/2006/main">
+<p:sld xmlns:a="http://schemas.openxmlformats.org/drawingml/2006/main" xmlns:r="http://schemas.openxmlformats.org/officeDocument/2006/relationships" xmlns:p="http://schemas.openxmlformats.org/presentationml/2006/main" show="0">
   <p:cSld>
     <p:spTree>
       <p:nvGrpSpPr>

--- a/הצגת קהל פרויכט יוד 2026 - יונתן טורפשטיין.pptx
+++ b/הצגת קהל פרויכט יוד 2026 - יונתן טורפשטיין.pptx
@@ -9896,8 +9896,8 @@
         </p:nvSpPr>
         <p:spPr>
           <a:xfrm>
-            <a:off x="7723149" y="859536"/>
-            <a:ext cx="4468851" cy="830997"/>
+            <a:off x="7530083" y="850392"/>
+            <a:ext cx="4661917" cy="1015663"/>
           </a:xfrm>
           <a:prstGeom prst="rect">
             <a:avLst/>
@@ -9910,28 +9910,43 @@
           </a:bodyPr>
           <a:lstStyle/>
           <a:p>
-            <a:pPr algn="r" rtl="1"/>
-            <a:r>
-              <a:rPr lang="he-IL" sz="2400" dirty="0"/>
+            <a:pPr algn="ctr" rtl="1"/>
+            <a:r>
+              <a:rPr lang="he-IL" sz="2000" dirty="0"/>
               <a:t>דוגמה לשורה של </a:t>
             </a:r>
             <a:r>
-              <a:rPr lang="en-US" sz="2400" dirty="0" err="1"/>
+              <a:rPr lang="en-US" sz="2000" dirty="0" err="1"/>
               <a:t>gcode</a:t>
             </a:r>
             <a:r>
-              <a:rPr lang="he-IL" sz="2400" dirty="0"/>
+              <a:rPr lang="he-IL" sz="2000" dirty="0"/>
               <a:t>:</a:t>
             </a:r>
-            <a:endParaRPr lang="en-US" sz="2400" dirty="0"/>
-          </a:p>
-          <a:p>
-            <a:pPr algn="r" rtl="1"/>
-            <a:r>
-              <a:rPr lang="en-US" sz="2400" dirty="0"/>
+            <a:endParaRPr lang="en-US" sz="2000" dirty="0"/>
+          </a:p>
+          <a:p>
+            <a:pPr rtl="1"/>
+            <a:r>
+              <a:rPr lang="en-US" sz="2000" dirty="0"/>
               <a:t>G1 X67 Y69 E420 F1000 ;comment</a:t>
             </a:r>
-            <a:endParaRPr lang="en-001" sz="2400" dirty="0"/>
+          </a:p>
+          <a:p>
+            <a:pPr rtl="1"/>
+            <a:r>
+              <a:rPr lang="en-US" sz="2000" dirty="0"/>
+              <a:t>Move(67, 69, </a:t>
+            </a:r>
+            <a:r>
+              <a:rPr lang="en-US" sz="2000" dirty="0" err="1"/>
+              <a:t>posZ</a:t>
+            </a:r>
+            <a:r>
+              <a:rPr lang="en-US" sz="2000" dirty="0"/>
+              <a:t>, 420, 1000); //comment</a:t>
+            </a:r>
+            <a:endParaRPr lang="en-001" sz="2000" dirty="0"/>
           </a:p>
         </p:txBody>
       </p:sp>
@@ -10416,13 +10431,13 @@
   <p:clrMapOvr>
     <a:masterClrMapping/>
   </p:clrMapOvr>
-  <mc:AlternateContent xmlns:mc="http://schemas.openxmlformats.org/markup-compatibility/2006">
-    <mc:Choice xmlns:p14="http://schemas.microsoft.com/office/powerpoint/2010/main" Requires="p14">
+  <mc:AlternateContent xmlns:mc="http://schemas.openxmlformats.org/markup-compatibility/2006" xmlns:p14="http://schemas.microsoft.com/office/powerpoint/2010/main">
+    <mc:Choice Requires="p14">
       <p:transition spd="slow" p14:dur="1500">
         <p:random/>
       </p:transition>
     </mc:Choice>
-    <mc:Fallback>
+    <mc:Fallback xmlns="">
       <p:transition spd="slow">
         <p:random/>
       </p:transition>
